--- a/黒崎/AI研修一覧/A-106_プロンプト実践テクニック/スライド.pptx
+++ b/黒崎/AI研修一覧/A-106_プロンプト実践テクニック/スライド.pptx
@@ -2149,14 +2149,16 @@
           <a:ln/>
         </p:spPr>
         <p:txBody>
-          <a:bodyPr wrap="square" lIns="0" tIns="0" rIns="0" bIns="0" rtlCol="0" anchor="ctr"/>
+          <a:bodyPr wrap="square" lIns="0" tIns="0" rIns="0" bIns="0" rtlCol="0" anchor="ctr">
+            <a:normAutofit/>
+          </a:bodyPr>
           <a:lstStyle/>
           <a:p>
             <a:pPr indent="0" marL="0">
               <a:buNone/>
             </a:pPr>
             <a:r>
-              <a:rPr lang="en-US" sz="3200" b="1" dirty="0">
+              <a:rPr lang="en-US" sz="2200" b="1" dirty="0">
                 <a:solidFill>
                   <a:srgbClr val="111827"/>
                 </a:solidFill>
@@ -2166,7 +2168,7 @@
               </a:rPr>
               <a:t>テクニック5 — 制約条件設定</a:t>
             </a:r>
-            <a:endParaRPr lang="en-US" sz="3200" dirty="0"/>
+            <a:endParaRPr lang="en-US" sz="2200" dirty="0"/>
           </a:p>
         </p:txBody>
       </p:sp>
@@ -2279,7 +2281,7 @@
         </p:nvSpPr>
         <p:spPr>
           <a:xfrm>
-            <a:off x="822960" y="1051560"/>
+            <a:off x="822960" y="1371600"/>
             <a:ext cx="2377440" cy="1463040"/>
           </a:xfrm>
           <a:prstGeom prst="rect">
@@ -2304,7 +2306,7 @@
         </p:nvSpPr>
         <p:spPr>
           <a:xfrm>
-            <a:off x="822960" y="1051560"/>
+            <a:off x="822960" y="1371600"/>
             <a:ext cx="2377440" cy="54864"/>
           </a:xfrm>
           <a:prstGeom prst="rect">
@@ -2324,7 +2326,7 @@
         </p:nvSpPr>
         <p:spPr>
           <a:xfrm>
-            <a:off x="822960" y="1188720"/>
+            <a:off x="822960" y="1508760"/>
             <a:ext cx="2377440" cy="320040"/>
           </a:xfrm>
           <a:prstGeom prst="rect">
@@ -2363,7 +2365,7 @@
         </p:nvSpPr>
         <p:spPr>
           <a:xfrm>
-            <a:off x="960120" y="1554480"/>
+            <a:off x="960120" y="1874520"/>
             <a:ext cx="2103120" cy="822960"/>
           </a:xfrm>
           <a:prstGeom prst="rect">
@@ -2436,7 +2438,7 @@
         </p:nvSpPr>
         <p:spPr>
           <a:xfrm>
-            <a:off x="3383280" y="1051560"/>
+            <a:off x="3383280" y="1371600"/>
             <a:ext cx="2377440" cy="1463040"/>
           </a:xfrm>
           <a:prstGeom prst="rect">
@@ -2461,7 +2463,7 @@
         </p:nvSpPr>
         <p:spPr>
           <a:xfrm>
-            <a:off x="3383280" y="1051560"/>
+            <a:off x="3383280" y="1371600"/>
             <a:ext cx="2377440" cy="54864"/>
           </a:xfrm>
           <a:prstGeom prst="rect">
@@ -2481,7 +2483,7 @@
         </p:nvSpPr>
         <p:spPr>
           <a:xfrm>
-            <a:off x="3383280" y="1188720"/>
+            <a:off x="3383280" y="1508760"/>
             <a:ext cx="2377440" cy="320040"/>
           </a:xfrm>
           <a:prstGeom prst="rect">
@@ -2520,7 +2522,7 @@
         </p:nvSpPr>
         <p:spPr>
           <a:xfrm>
-            <a:off x="3520440" y="1554480"/>
+            <a:off x="3520440" y="1874520"/>
             <a:ext cx="2103120" cy="822960"/>
           </a:xfrm>
           <a:prstGeom prst="rect">
@@ -2576,7 +2578,7 @@
         </p:nvSpPr>
         <p:spPr>
           <a:xfrm>
-            <a:off x="5943600" y="1051560"/>
+            <a:off x="5943600" y="1371600"/>
             <a:ext cx="2377440" cy="1463040"/>
           </a:xfrm>
           <a:prstGeom prst="rect">
@@ -2601,7 +2603,7 @@
         </p:nvSpPr>
         <p:spPr>
           <a:xfrm>
-            <a:off x="5943600" y="1051560"/>
+            <a:off x="5943600" y="1371600"/>
             <a:ext cx="2377440" cy="54864"/>
           </a:xfrm>
           <a:prstGeom prst="rect">
@@ -2621,7 +2623,7 @@
         </p:nvSpPr>
         <p:spPr>
           <a:xfrm>
-            <a:off x="5943600" y="1188720"/>
+            <a:off x="5943600" y="1508760"/>
             <a:ext cx="2377440" cy="320040"/>
           </a:xfrm>
           <a:prstGeom prst="rect">
@@ -2660,7 +2662,7 @@
         </p:nvSpPr>
         <p:spPr>
           <a:xfrm>
-            <a:off x="6080760" y="1554480"/>
+            <a:off x="6080760" y="1874520"/>
             <a:ext cx="2103120" cy="822960"/>
           </a:xfrm>
           <a:prstGeom prst="rect">
@@ -2716,8 +2718,8 @@
         </p:nvSpPr>
         <p:spPr>
           <a:xfrm>
-            <a:off x="685800" y="2788920"/>
-            <a:ext cx="3566160" cy="1463040"/>
+            <a:off x="685800" y="3017520"/>
+            <a:ext cx="3566160" cy="1280160"/>
           </a:xfrm>
           <a:prstGeom prst="rect">
             <a:avLst/>
@@ -2741,7 +2743,7 @@
         </p:nvSpPr>
         <p:spPr>
           <a:xfrm>
-            <a:off x="685800" y="2788920"/>
+            <a:off x="685800" y="3017520"/>
             <a:ext cx="3566160" cy="320040"/>
           </a:xfrm>
           <a:prstGeom prst="rect">
@@ -2761,7 +2763,7 @@
         </p:nvSpPr>
         <p:spPr>
           <a:xfrm>
-            <a:off x="822960" y="2788920"/>
+            <a:off x="822960" y="3017520"/>
             <a:ext cx="1828800" cy="320040"/>
           </a:xfrm>
           <a:prstGeom prst="rect">
@@ -2800,7 +2802,7 @@
         </p:nvSpPr>
         <p:spPr>
           <a:xfrm>
-            <a:off x="822960" y="3200400"/>
+            <a:off x="822960" y="3429000"/>
             <a:ext cx="3291840" cy="731520"/>
           </a:xfrm>
           <a:prstGeom prst="rect">
@@ -2856,8 +2858,8 @@
         </p:nvSpPr>
         <p:spPr>
           <a:xfrm>
-            <a:off x="4892040" y="2788920"/>
-            <a:ext cx="3566160" cy="1463040"/>
+            <a:off x="4892040" y="3017520"/>
+            <a:ext cx="3566160" cy="1280160"/>
           </a:xfrm>
           <a:prstGeom prst="rect">
             <a:avLst/>
@@ -2881,7 +2883,7 @@
         </p:nvSpPr>
         <p:spPr>
           <a:xfrm>
-            <a:off x="4892040" y="2788920"/>
+            <a:off x="4892040" y="3017520"/>
             <a:ext cx="3566160" cy="320040"/>
           </a:xfrm>
           <a:prstGeom prst="rect">
@@ -2901,7 +2903,7 @@
         </p:nvSpPr>
         <p:spPr>
           <a:xfrm>
-            <a:off x="5029200" y="2788920"/>
+            <a:off x="5029200" y="3017520"/>
             <a:ext cx="1828800" cy="320040"/>
           </a:xfrm>
           <a:prstGeom prst="rect">
@@ -2940,7 +2942,7 @@
         </p:nvSpPr>
         <p:spPr>
           <a:xfrm>
-            <a:off x="5029200" y="3200400"/>
+            <a:off x="5029200" y="3429000"/>
             <a:ext cx="3291840" cy="731520"/>
           </a:xfrm>
           <a:prstGeom prst="rect">
@@ -3075,14 +3077,16 @@
           <a:ln/>
         </p:spPr>
         <p:txBody>
-          <a:bodyPr wrap="square" lIns="0" tIns="0" rIns="0" bIns="0" rtlCol="0" anchor="ctr"/>
+          <a:bodyPr wrap="square" lIns="0" tIns="0" rIns="0" bIns="0" rtlCol="0" anchor="ctr">
+            <a:normAutofit/>
+          </a:bodyPr>
           <a:lstStyle/>
           <a:p>
             <a:pPr indent="0" marL="0">
               <a:buNone/>
             </a:pPr>
             <a:r>
-              <a:rPr lang="en-US" sz="3200" b="1" dirty="0">
+              <a:rPr lang="en-US" sz="2200" b="1" dirty="0">
                 <a:solidFill>
                   <a:srgbClr val="111827"/>
                 </a:solidFill>
@@ -3092,7 +3096,7 @@
               </a:rPr>
               <a:t>テクニック使い分けガイド</a:t>
             </a:r>
-            <a:endParaRPr lang="en-US" sz="3200" dirty="0"/>
+            <a:endParaRPr lang="en-US" sz="2200" dirty="0"/>
           </a:p>
         </p:txBody>
       </p:sp>
@@ -5407,14 +5411,16 @@
           <a:ln/>
         </p:spPr>
         <p:txBody>
-          <a:bodyPr wrap="square" lIns="0" tIns="0" rIns="0" bIns="0" rtlCol="0" anchor="ctr"/>
+          <a:bodyPr wrap="square" lIns="0" tIns="0" rIns="0" bIns="0" rtlCol="0" anchor="ctr">
+            <a:normAutofit/>
+          </a:bodyPr>
           <a:lstStyle/>
           <a:p>
             <a:pPr indent="0" marL="0">
               <a:buNone/>
             </a:pPr>
             <a:r>
-              <a:rPr lang="en-US" sz="3200" b="1" dirty="0">
+              <a:rPr lang="en-US" sz="2200" b="1" dirty="0">
                 <a:solidFill>
                   <a:srgbClr val="111827"/>
                 </a:solidFill>
@@ -5424,7 +5430,7 @@
               </a:rPr>
               <a:t>今日のゴール</a:t>
             </a:r>
-            <a:endParaRPr lang="en-US" sz="3200" dirty="0"/>
+            <a:endParaRPr lang="en-US" sz="2200" dirty="0"/>
           </a:p>
         </p:txBody>
       </p:sp>
@@ -5885,14 +5891,16 @@
           <a:ln/>
         </p:spPr>
         <p:txBody>
-          <a:bodyPr wrap="square" lIns="0" tIns="0" rIns="0" bIns="0" rtlCol="0" anchor="ctr"/>
+          <a:bodyPr wrap="square" lIns="0" tIns="0" rIns="0" bIns="0" rtlCol="0" anchor="ctr">
+            <a:normAutofit/>
+          </a:bodyPr>
           <a:lstStyle/>
           <a:p>
             <a:pPr indent="0" marL="0">
               <a:buNone/>
             </a:pPr>
             <a:r>
-              <a:rPr lang="en-US" sz="3200" b="1" dirty="0">
+              <a:rPr lang="en-US" sz="2200" b="1" dirty="0">
                 <a:solidFill>
                   <a:srgbClr val="111827"/>
                 </a:solidFill>
@@ -5902,7 +5910,7 @@
               </a:rPr>
               <a:t>プロンプト実践テクニック 5選</a:t>
             </a:r>
-            <a:endParaRPr lang="en-US" sz="3200" dirty="0"/>
+            <a:endParaRPr lang="en-US" sz="2200" dirty="0"/>
           </a:p>
         </p:txBody>
       </p:sp>
@@ -7078,14 +7086,16 @@
           <a:ln/>
         </p:spPr>
         <p:txBody>
-          <a:bodyPr wrap="square" lIns="0" tIns="0" rIns="0" bIns="0" rtlCol="0" anchor="ctr"/>
+          <a:bodyPr wrap="square" lIns="0" tIns="0" rIns="0" bIns="0" rtlCol="0" anchor="ctr">
+            <a:normAutofit/>
+          </a:bodyPr>
           <a:lstStyle/>
           <a:p>
             <a:pPr indent="0" marL="0">
               <a:buNone/>
             </a:pPr>
             <a:r>
-              <a:rPr lang="en-US" sz="3200" b="1" dirty="0">
+              <a:rPr lang="en-US" sz="2200" b="1" dirty="0">
                 <a:solidFill>
                   <a:srgbClr val="111827"/>
                 </a:solidFill>
@@ -7095,7 +7105,7 @@
               </a:rPr>
               <a:t>テクニック1 — Few-shot（例示）</a:t>
             </a:r>
-            <a:endParaRPr lang="en-US" sz="3200" dirty="0"/>
+            <a:endParaRPr lang="en-US" sz="2200" dirty="0"/>
           </a:p>
         </p:txBody>
       </p:sp>
@@ -7208,8 +7218,8 @@
         </p:nvSpPr>
         <p:spPr>
           <a:xfrm>
-            <a:off x="685800" y="1051560"/>
-            <a:ext cx="7772400" cy="502920"/>
+            <a:off x="685800" y="1371600"/>
+            <a:ext cx="7772400" cy="411480"/>
           </a:xfrm>
           <a:prstGeom prst="rect">
             <a:avLst/>
@@ -7228,8 +7238,8 @@
         </p:nvSpPr>
         <p:spPr>
           <a:xfrm>
-            <a:off x="868680" y="1051560"/>
-            <a:ext cx="7406640" cy="502920"/>
+            <a:off x="868680" y="1371600"/>
+            <a:ext cx="7406640" cy="411480"/>
           </a:xfrm>
           <a:prstGeom prst="rect">
             <a:avLst/>
@@ -7245,7 +7255,7 @@
               <a:buNone/>
             </a:pPr>
             <a:r>
-              <a:rPr lang="en-US" sz="1600" b="1" dirty="0">
+              <a:rPr lang="en-US" sz="1300" b="1" dirty="0">
                 <a:solidFill>
                   <a:srgbClr val="2563EB"/>
                 </a:solidFill>
@@ -7255,7 +7265,7 @@
               </a:rPr>
               <a:t>期待する入出力の「例」を2〜3個示してからタスクを依頼する</a:t>
             </a:r>
-            <a:endParaRPr lang="en-US" sz="1600" dirty="0"/>
+            <a:endParaRPr lang="en-US" sz="1300" dirty="0"/>
           </a:p>
         </p:txBody>
       </p:sp>
@@ -7267,8 +7277,8 @@
         </p:nvSpPr>
         <p:spPr>
           <a:xfrm>
-            <a:off x="685800" y="1783080"/>
-            <a:ext cx="3566160" cy="2468880"/>
+            <a:off x="685800" y="1965960"/>
+            <a:ext cx="3566160" cy="2286000"/>
           </a:xfrm>
           <a:prstGeom prst="rect">
             <a:avLst/>
@@ -7292,7 +7302,7 @@
         </p:nvSpPr>
         <p:spPr>
           <a:xfrm>
-            <a:off x="685800" y="1783080"/>
+            <a:off x="685800" y="1965960"/>
             <a:ext cx="3566160" cy="411480"/>
           </a:xfrm>
           <a:prstGeom prst="rect">
@@ -7320,7 +7330,7 @@
         </p:blipFill>
         <p:spPr>
           <a:xfrm>
-            <a:off x="795528" y="1856232"/>
+            <a:off x="795528" y="2039112"/>
             <a:ext cx="228600" cy="228600"/>
           </a:xfrm>
           <a:prstGeom prst="rect">
@@ -7336,7 +7346,7 @@
         </p:nvSpPr>
         <p:spPr>
           <a:xfrm>
-            <a:off x="1097280" y="1783080"/>
+            <a:off x="1097280" y="1965960"/>
             <a:ext cx="2743200" cy="411480"/>
           </a:xfrm>
           <a:prstGeom prst="rect">
@@ -7375,7 +7385,7 @@
         </p:nvSpPr>
         <p:spPr>
           <a:xfrm>
-            <a:off x="868680" y="2377440"/>
+            <a:off x="868680" y="2560320"/>
             <a:ext cx="3200400" cy="640080"/>
           </a:xfrm>
           <a:prstGeom prst="rect">
@@ -7431,7 +7441,7 @@
         </p:nvSpPr>
         <p:spPr>
           <a:xfrm>
-            <a:off x="868680" y="3429000"/>
+            <a:off x="868680" y="3611880"/>
             <a:ext cx="3200400" cy="365760"/>
           </a:xfrm>
           <a:prstGeom prst="rect">
@@ -7478,7 +7488,7 @@
         </p:blipFill>
         <p:spPr>
           <a:xfrm>
-            <a:off x="4343400" y="2834640"/>
+            <a:off x="4343400" y="2926080"/>
             <a:ext cx="320040" cy="320040"/>
           </a:xfrm>
           <a:prstGeom prst="rect">
@@ -7494,8 +7504,8 @@
         </p:nvSpPr>
         <p:spPr>
           <a:xfrm>
-            <a:off x="4800600" y="1783080"/>
-            <a:ext cx="3566160" cy="2468880"/>
+            <a:off x="4800600" y="1965960"/>
+            <a:ext cx="3566160" cy="2286000"/>
           </a:xfrm>
           <a:prstGeom prst="rect">
             <a:avLst/>
@@ -7519,7 +7529,7 @@
         </p:nvSpPr>
         <p:spPr>
           <a:xfrm>
-            <a:off x="4800600" y="1783080"/>
+            <a:off x="4800600" y="1965960"/>
             <a:ext cx="3566160" cy="411480"/>
           </a:xfrm>
           <a:prstGeom prst="rect">
@@ -7547,7 +7557,7 @@
         </p:blipFill>
         <p:spPr>
           <a:xfrm>
-            <a:off x="4910328" y="1856232"/>
+            <a:off x="4910328" y="2039112"/>
             <a:ext cx="228600" cy="228600"/>
           </a:xfrm>
           <a:prstGeom prst="rect">
@@ -7563,7 +7573,7 @@
         </p:nvSpPr>
         <p:spPr>
           <a:xfrm>
-            <a:off x="5212080" y="1783080"/>
+            <a:off x="5212080" y="1965960"/>
             <a:ext cx="2743200" cy="411480"/>
           </a:xfrm>
           <a:prstGeom prst="rect">
@@ -7602,7 +7612,7 @@
         </p:nvSpPr>
         <p:spPr>
           <a:xfrm>
-            <a:off x="4983480" y="2331720"/>
+            <a:off x="4983480" y="2514600"/>
             <a:ext cx="3200400" cy="274320"/>
           </a:xfrm>
           <a:prstGeom prst="rect">
@@ -7641,7 +7651,7 @@
         </p:nvSpPr>
         <p:spPr>
           <a:xfrm>
-            <a:off x="4983480" y="2651760"/>
+            <a:off x="4983480" y="2834640"/>
             <a:ext cx="3200400" cy="274320"/>
           </a:xfrm>
           <a:prstGeom prst="rect">
@@ -7680,7 +7690,7 @@
         </p:nvSpPr>
         <p:spPr>
           <a:xfrm>
-            <a:off x="4983480" y="2971800"/>
+            <a:off x="4983480" y="3154680"/>
             <a:ext cx="3200400" cy="274320"/>
           </a:xfrm>
           <a:prstGeom prst="rect">
@@ -7719,7 +7729,7 @@
         </p:nvSpPr>
         <p:spPr>
           <a:xfrm>
-            <a:off x="4983480" y="3429000"/>
+            <a:off x="4983480" y="3611880"/>
             <a:ext cx="3200400" cy="365760"/>
           </a:xfrm>
           <a:prstGeom prst="rect">
@@ -7940,14 +7950,16 @@
           <a:ln/>
         </p:spPr>
         <p:txBody>
-          <a:bodyPr wrap="square" lIns="0" tIns="0" rIns="0" bIns="0" rtlCol="0" anchor="ctr"/>
+          <a:bodyPr wrap="square" lIns="0" tIns="0" rIns="0" bIns="0" rtlCol="0" anchor="ctr">
+            <a:normAutofit/>
+          </a:bodyPr>
           <a:lstStyle/>
           <a:p>
             <a:pPr indent="0" marL="0">
               <a:buNone/>
             </a:pPr>
             <a:r>
-              <a:rPr lang="en-US" sz="3200" b="1" dirty="0">
+              <a:rPr lang="en-US" sz="2200" b="1" dirty="0">
                 <a:solidFill>
                   <a:srgbClr val="111827"/>
                 </a:solidFill>
@@ -7957,7 +7969,7 @@
               </a:rPr>
               <a:t>Few-shot 応用 — 業務での活用シーン</a:t>
             </a:r>
-            <a:endParaRPr lang="en-US" sz="3200" dirty="0"/>
+            <a:endParaRPr lang="en-US" sz="2200" dirty="0"/>
           </a:p>
         </p:txBody>
       </p:sp>
@@ -8717,14 +8729,16 @@
           <a:ln/>
         </p:spPr>
         <p:txBody>
-          <a:bodyPr wrap="square" lIns="0" tIns="0" rIns="0" bIns="0" rtlCol="0" anchor="ctr"/>
+          <a:bodyPr wrap="square" lIns="0" tIns="0" rIns="0" bIns="0" rtlCol="0" anchor="ctr">
+            <a:normAutofit/>
+          </a:bodyPr>
           <a:lstStyle/>
           <a:p>
             <a:pPr indent="0" marL="0">
               <a:buNone/>
             </a:pPr>
             <a:r>
-              <a:rPr lang="en-US" sz="3200" b="1" dirty="0">
+              <a:rPr lang="en-US" sz="2200" b="1" dirty="0">
                 <a:solidFill>
                   <a:srgbClr val="111827"/>
                 </a:solidFill>
@@ -8734,52 +8748,13 @@
               </a:rPr>
               <a:t>テクニック2 — Chain-of-Thought</a:t>
             </a:r>
-            <a:endParaRPr lang="en-US" sz="3200" dirty="0"/>
-          </a:p>
-        </p:txBody>
-      </p:sp>
-      <p:sp>
-        <p:nvSpPr>
-          <p:cNvPr id="6" name="Text 4"/>
-          <p:cNvSpPr/>
-          <p:nvPr/>
-        </p:nvSpPr>
-        <p:spPr>
-          <a:xfrm>
-            <a:off x="685800" y="960120"/>
-            <a:ext cx="7772400" cy="274320"/>
-          </a:xfrm>
-          <a:prstGeom prst="rect">
-            <a:avLst/>
-          </a:prstGeom>
-          <a:noFill/>
-          <a:ln/>
-        </p:spPr>
-        <p:txBody>
-          <a:bodyPr wrap="square" lIns="0" tIns="0" rIns="0" bIns="0" rtlCol="0" anchor="ctr"/>
-          <a:lstStyle/>
-          <a:p>
-            <a:pPr indent="0" marL="0">
-              <a:buNone/>
-            </a:pPr>
-            <a:r>
-              <a:rPr lang="en-US" sz="1600" dirty="0">
-                <a:solidFill>
-                  <a:srgbClr val="6B7280"/>
-                </a:solidFill>
-                <a:latin typeface="Calibri" pitchFamily="34" charset="0"/>
-                <a:ea typeface="Calibri" pitchFamily="34" charset="-122"/>
-                <a:cs typeface="Calibri" pitchFamily="34" charset="-120"/>
-              </a:rPr>
-              <a:t>段階的思考</a:t>
-            </a:r>
-            <a:endParaRPr lang="en-US" sz="1600" dirty="0"/>
-          </a:p>
-        </p:txBody>
-      </p:sp>
-      <p:sp>
-        <p:nvSpPr>
-          <p:cNvPr id="7" name="Shape 5"/>
+            <a:endParaRPr lang="en-US" sz="2200" dirty="0"/>
+          </a:p>
+        </p:txBody>
+      </p:sp>
+      <p:sp>
+        <p:nvSpPr>
+          <p:cNvPr id="6" name="Shape 4"/>
           <p:cNvSpPr/>
           <p:nvPr/>
         </p:nvSpPr>
@@ -8802,7 +8777,7 @@
       </p:sp>
       <p:sp>
         <p:nvSpPr>
-          <p:cNvPr id="8" name="Text 6"/>
+          <p:cNvPr id="7" name="Text 5"/>
           <p:cNvSpPr/>
           <p:nvPr/>
         </p:nvSpPr>
@@ -8841,7 +8816,7 @@
       </p:sp>
       <p:sp>
         <p:nvSpPr>
-          <p:cNvPr id="9" name="Text 7"/>
+          <p:cNvPr id="8" name="Text 6"/>
           <p:cNvSpPr/>
           <p:nvPr/>
         </p:nvSpPr>
@@ -8880,14 +8855,14 @@
       </p:sp>
       <p:sp>
         <p:nvSpPr>
-          <p:cNvPr id="10" name="Shape 8"/>
-          <p:cNvSpPr/>
-          <p:nvPr/>
-        </p:nvSpPr>
-        <p:spPr>
-          <a:xfrm>
-            <a:off x="685800" y="1234440"/>
-            <a:ext cx="3566160" cy="2560320"/>
+          <p:cNvPr id="9" name="Shape 7"/>
+          <p:cNvSpPr/>
+          <p:nvPr/>
+        </p:nvSpPr>
+        <p:spPr>
+          <a:xfrm>
+            <a:off x="685800" y="1371600"/>
+            <a:ext cx="3566160" cy="2468880"/>
           </a:xfrm>
           <a:prstGeom prst="rect">
             <a:avLst/>
@@ -8905,13 +8880,13 @@
       </p:sp>
       <p:sp>
         <p:nvSpPr>
-          <p:cNvPr id="11" name="Shape 9"/>
-          <p:cNvSpPr/>
-          <p:nvPr/>
-        </p:nvSpPr>
-        <p:spPr>
-          <a:xfrm>
-            <a:off x="685800" y="1234440"/>
+          <p:cNvPr id="10" name="Shape 8"/>
+          <p:cNvSpPr/>
+          <p:nvPr/>
+        </p:nvSpPr>
+        <p:spPr>
+          <a:xfrm>
+            <a:off x="685800" y="1371600"/>
             <a:ext cx="3566160" cy="411480"/>
           </a:xfrm>
           <a:prstGeom prst="rect">
@@ -8925,14 +8900,53 @@
       </p:sp>
       <p:sp>
         <p:nvSpPr>
+          <p:cNvPr id="11" name="Text 9"/>
+          <p:cNvSpPr/>
+          <p:nvPr/>
+        </p:nvSpPr>
+        <p:spPr>
+          <a:xfrm>
+            <a:off x="868680" y="1371600"/>
+            <a:ext cx="2743200" cy="411480"/>
+          </a:xfrm>
+          <a:prstGeom prst="rect">
+            <a:avLst/>
+          </a:prstGeom>
+          <a:noFill/>
+          <a:ln/>
+        </p:spPr>
+        <p:txBody>
+          <a:bodyPr wrap="square" lIns="0" tIns="0" rIns="0" bIns="0" rtlCol="0" anchor="ctr"/>
+          <a:lstStyle/>
+          <a:p>
+            <a:pPr indent="0" marL="0">
+              <a:buNone/>
+            </a:pPr>
+            <a:r>
+              <a:rPr lang="en-US" sz="1600" b="1" dirty="0">
+                <a:solidFill>
+                  <a:srgbClr val="DC2626"/>
+                </a:solidFill>
+                <a:latin typeface="Calibri" pitchFamily="34" charset="0"/>
+                <a:ea typeface="Calibri" pitchFamily="34" charset="-122"/>
+                <a:cs typeface="Calibri" pitchFamily="34" charset="-120"/>
+              </a:rPr>
+              <a:t>通常プロンプト</a:t>
+            </a:r>
+            <a:endParaRPr lang="en-US" sz="1600" dirty="0"/>
+          </a:p>
+        </p:txBody>
+      </p:sp>
+      <p:sp>
+        <p:nvSpPr>
           <p:cNvPr id="12" name="Text 10"/>
           <p:cNvSpPr/>
           <p:nvPr/>
         </p:nvSpPr>
         <p:spPr>
           <a:xfrm>
-            <a:off x="868680" y="1234440"/>
-            <a:ext cx="2743200" cy="411480"/>
+            <a:off x="868680" y="1965960"/>
+            <a:ext cx="3200400" cy="640080"/>
           </a:xfrm>
           <a:prstGeom prst="rect">
             <a:avLst/>
@@ -8948,17 +8962,34 @@
               <a:buNone/>
             </a:pPr>
             <a:r>
-              <a:rPr lang="en-US" sz="1600" b="1" dirty="0">
-                <a:solidFill>
-                  <a:srgbClr val="DC2626"/>
-                </a:solidFill>
-                <a:latin typeface="Calibri" pitchFamily="34" charset="0"/>
-                <a:ea typeface="Calibri" pitchFamily="34" charset="-122"/>
-                <a:cs typeface="Calibri" pitchFamily="34" charset="-120"/>
-              </a:rPr>
-              <a:t>通常プロンプト</a:t>
-            </a:r>
-            <a:endParaRPr lang="en-US" sz="1600" dirty="0"/>
+              <a:rPr lang="en-US" sz="1300" i="1" dirty="0">
+                <a:solidFill>
+                  <a:srgbClr val="374151"/>
+                </a:solidFill>
+                <a:latin typeface="Calibri" pitchFamily="34" charset="0"/>
+                <a:ea typeface="Calibri" pitchFamily="34" charset="-122"/>
+                <a:cs typeface="Calibri" pitchFamily="34" charset="-120"/>
+              </a:rPr>
+              <a:t>「マーケティング予算100万円の</a:t>
+            </a:r>
+            <a:endParaRPr lang="en-US" sz="1300" dirty="0"/>
+          </a:p>
+          <a:p>
+            <a:pPr indent="0" marL="0">
+              <a:buNone/>
+            </a:pPr>
+            <a:r>
+              <a:rPr lang="en-US" sz="1300" i="1" dirty="0">
+                <a:solidFill>
+                  <a:srgbClr val="374151"/>
+                </a:solidFill>
+                <a:latin typeface="Calibri" pitchFamily="34" charset="0"/>
+                <a:ea typeface="Calibri" pitchFamily="34" charset="-122"/>
+                <a:cs typeface="Calibri" pitchFamily="34" charset="-120"/>
+              </a:rPr>
+              <a:t>最適な配分を教えて」</a:t>
+            </a:r>
+            <a:endParaRPr lang="en-US" sz="1300" dirty="0"/>
           </a:p>
         </p:txBody>
       </p:sp>
@@ -8970,63 +9001,7 @@
         </p:nvSpPr>
         <p:spPr>
           <a:xfrm>
-            <a:off x="868680" y="1828800"/>
-            <a:ext cx="3200400" cy="640080"/>
-          </a:xfrm>
-          <a:prstGeom prst="rect">
-            <a:avLst/>
-          </a:prstGeom>
-          <a:noFill/>
-          <a:ln/>
-        </p:spPr>
-        <p:txBody>
-          <a:bodyPr wrap="square" lIns="0" tIns="0" rIns="0" bIns="0" rtlCol="0" anchor="ctr"/>
-          <a:lstStyle/>
-          <a:p>
-            <a:pPr indent="0" marL="0">
-              <a:buNone/>
-            </a:pPr>
-            <a:r>
-              <a:rPr lang="en-US" sz="1300" i="1" dirty="0">
-                <a:solidFill>
-                  <a:srgbClr val="374151"/>
-                </a:solidFill>
-                <a:latin typeface="Calibri" pitchFamily="34" charset="0"/>
-                <a:ea typeface="Calibri" pitchFamily="34" charset="-122"/>
-                <a:cs typeface="Calibri" pitchFamily="34" charset="-120"/>
-              </a:rPr>
-              <a:t>「マーケティング予算100万円の</a:t>
-            </a:r>
-            <a:endParaRPr lang="en-US" sz="1300" dirty="0"/>
-          </a:p>
-          <a:p>
-            <a:pPr indent="0" marL="0">
-              <a:buNone/>
-            </a:pPr>
-            <a:r>
-              <a:rPr lang="en-US" sz="1300" i="1" dirty="0">
-                <a:solidFill>
-                  <a:srgbClr val="374151"/>
-                </a:solidFill>
-                <a:latin typeface="Calibri" pitchFamily="34" charset="0"/>
-                <a:ea typeface="Calibri" pitchFamily="34" charset="-122"/>
-                <a:cs typeface="Calibri" pitchFamily="34" charset="-120"/>
-              </a:rPr>
-              <a:t>最適な配分を教えて」</a:t>
-            </a:r>
-            <a:endParaRPr lang="en-US" sz="1300" dirty="0"/>
-          </a:p>
-        </p:txBody>
-      </p:sp>
-      <p:sp>
-        <p:nvSpPr>
-          <p:cNvPr id="14" name="Text 12"/>
-          <p:cNvSpPr/>
-          <p:nvPr/>
-        </p:nvSpPr>
-        <p:spPr>
-          <a:xfrm>
-            <a:off x="868680" y="3063240"/>
+            <a:off x="868680" y="3200400"/>
             <a:ext cx="3200400" cy="320040"/>
           </a:xfrm>
           <a:prstGeom prst="rect">
@@ -9059,7 +9034,7 @@
       </p:sp>
       <p:pic>
         <p:nvPicPr>
-          <p:cNvPr id="15" name="Image 0" descr="preencoded.png">    </p:cNvPr>
+          <p:cNvPr id="14" name="Image 0" descr="preencoded.png">    </p:cNvPr>
           <p:cNvPicPr>
             <a:picLocks noChangeAspect="1"/>
           </p:cNvPicPr>
@@ -9073,7 +9048,7 @@
         </p:blipFill>
         <p:spPr>
           <a:xfrm>
-            <a:off x="4343400" y="2331720"/>
+            <a:off x="4343400" y="2423160"/>
             <a:ext cx="320040" cy="320040"/>
           </a:xfrm>
           <a:prstGeom prst="rect">
@@ -9083,14 +9058,14 @@
       </p:pic>
       <p:sp>
         <p:nvSpPr>
-          <p:cNvPr id="16" name="Shape 13"/>
-          <p:cNvSpPr/>
-          <p:nvPr/>
-        </p:nvSpPr>
-        <p:spPr>
-          <a:xfrm>
-            <a:off x="4800600" y="1234440"/>
-            <a:ext cx="3566160" cy="2560320"/>
+          <p:cNvPr id="15" name="Shape 12"/>
+          <p:cNvSpPr/>
+          <p:nvPr/>
+        </p:nvSpPr>
+        <p:spPr>
+          <a:xfrm>
+            <a:off x="4800600" y="1371600"/>
+            <a:ext cx="3566160" cy="2468880"/>
           </a:xfrm>
           <a:prstGeom prst="rect">
             <a:avLst/>
@@ -9108,13 +9083,13 @@
       </p:sp>
       <p:sp>
         <p:nvSpPr>
-          <p:cNvPr id="17" name="Shape 14"/>
-          <p:cNvSpPr/>
-          <p:nvPr/>
-        </p:nvSpPr>
-        <p:spPr>
-          <a:xfrm>
-            <a:off x="4800600" y="1234440"/>
+          <p:cNvPr id="16" name="Shape 13"/>
+          <p:cNvSpPr/>
+          <p:nvPr/>
+        </p:nvSpPr>
+        <p:spPr>
+          <a:xfrm>
+            <a:off x="4800600" y="1371600"/>
             <a:ext cx="3566160" cy="411480"/>
           </a:xfrm>
           <a:prstGeom prst="rect">
@@ -9128,14 +9103,53 @@
       </p:sp>
       <p:sp>
         <p:nvSpPr>
+          <p:cNvPr id="17" name="Text 14"/>
+          <p:cNvSpPr/>
+          <p:nvPr/>
+        </p:nvSpPr>
+        <p:spPr>
+          <a:xfrm>
+            <a:off x="4983480" y="1371600"/>
+            <a:ext cx="2743200" cy="411480"/>
+          </a:xfrm>
+          <a:prstGeom prst="rect">
+            <a:avLst/>
+          </a:prstGeom>
+          <a:noFill/>
+          <a:ln/>
+        </p:spPr>
+        <p:txBody>
+          <a:bodyPr wrap="square" lIns="0" tIns="0" rIns="0" bIns="0" rtlCol="0" anchor="ctr"/>
+          <a:lstStyle/>
+          <a:p>
+            <a:pPr indent="0" marL="0">
+              <a:buNone/>
+            </a:pPr>
+            <a:r>
+              <a:rPr lang="en-US" sz="1600" b="1" dirty="0">
+                <a:solidFill>
+                  <a:srgbClr val="059669"/>
+                </a:solidFill>
+                <a:latin typeface="Calibri" pitchFamily="34" charset="0"/>
+                <a:ea typeface="Calibri" pitchFamily="34" charset="-122"/>
+                <a:cs typeface="Calibri" pitchFamily="34" charset="-120"/>
+              </a:rPr>
+              <a:t>CoTプロンプト</a:t>
+            </a:r>
+            <a:endParaRPr lang="en-US" sz="1600" dirty="0"/>
+          </a:p>
+        </p:txBody>
+      </p:sp>
+      <p:sp>
+        <p:nvSpPr>
           <p:cNvPr id="18" name="Text 15"/>
           <p:cNvSpPr/>
           <p:nvPr/>
         </p:nvSpPr>
         <p:spPr>
           <a:xfrm>
-            <a:off x="4983480" y="1234440"/>
-            <a:ext cx="2743200" cy="411480"/>
+            <a:off x="4983480" y="1920240"/>
+            <a:ext cx="3200400" cy="228600"/>
           </a:xfrm>
           <a:prstGeom prst="rect">
             <a:avLst/>
@@ -9151,7 +9165,202 @@
               <a:buNone/>
             </a:pPr>
             <a:r>
-              <a:rPr lang="en-US" sz="1600" b="1" dirty="0">
+              <a:rPr lang="en-US" sz="1300" dirty="0">
+                <a:solidFill>
+                  <a:srgbClr val="374151"/>
+                </a:solidFill>
+                <a:latin typeface="Calibri" pitchFamily="34" charset="0"/>
+                <a:ea typeface="Calibri" pitchFamily="34" charset="-122"/>
+                <a:cs typeface="Calibri" pitchFamily="34" charset="-120"/>
+              </a:rPr>
+              <a:t>1. 市場状況を分析</a:t>
+            </a:r>
+            <a:endParaRPr lang="en-US" sz="1300" dirty="0"/>
+          </a:p>
+        </p:txBody>
+      </p:sp>
+      <p:sp>
+        <p:nvSpPr>
+          <p:cNvPr id="19" name="Text 16"/>
+          <p:cNvSpPr/>
+          <p:nvPr/>
+        </p:nvSpPr>
+        <p:spPr>
+          <a:xfrm>
+            <a:off x="4983480" y="2194560"/>
+            <a:ext cx="3200400" cy="228600"/>
+          </a:xfrm>
+          <a:prstGeom prst="rect">
+            <a:avLst/>
+          </a:prstGeom>
+          <a:noFill/>
+          <a:ln/>
+        </p:spPr>
+        <p:txBody>
+          <a:bodyPr wrap="square" lIns="0" tIns="0" rIns="0" bIns="0" rtlCol="0" anchor="ctr"/>
+          <a:lstStyle/>
+          <a:p>
+            <a:pPr indent="0" marL="0">
+              <a:buNone/>
+            </a:pPr>
+            <a:r>
+              <a:rPr lang="en-US" sz="1300" dirty="0">
+                <a:solidFill>
+                  <a:srgbClr val="374151"/>
+                </a:solidFill>
+                <a:latin typeface="Calibri" pitchFamily="34" charset="0"/>
+                <a:ea typeface="Calibri" pitchFamily="34" charset="-122"/>
+                <a:cs typeface="Calibri" pitchFamily="34" charset="-120"/>
+              </a:rPr>
+              <a:t>2. 各チャネルのROI推定</a:t>
+            </a:r>
+            <a:endParaRPr lang="en-US" sz="1300" dirty="0"/>
+          </a:p>
+        </p:txBody>
+      </p:sp>
+      <p:sp>
+        <p:nvSpPr>
+          <p:cNvPr id="20" name="Text 17"/>
+          <p:cNvSpPr/>
+          <p:nvPr/>
+        </p:nvSpPr>
+        <p:spPr>
+          <a:xfrm>
+            <a:off x="4983480" y="2468880"/>
+            <a:ext cx="3200400" cy="228600"/>
+          </a:xfrm>
+          <a:prstGeom prst="rect">
+            <a:avLst/>
+          </a:prstGeom>
+          <a:noFill/>
+          <a:ln/>
+        </p:spPr>
+        <p:txBody>
+          <a:bodyPr wrap="square" lIns="0" tIns="0" rIns="0" bIns="0" rtlCol="0" anchor="ctr"/>
+          <a:lstStyle/>
+          <a:p>
+            <a:pPr indent="0" marL="0">
+              <a:buNone/>
+            </a:pPr>
+            <a:r>
+              <a:rPr lang="en-US" sz="1300" dirty="0">
+                <a:solidFill>
+                  <a:srgbClr val="374151"/>
+                </a:solidFill>
+                <a:latin typeface="Calibri" pitchFamily="34" charset="0"/>
+                <a:ea typeface="Calibri" pitchFamily="34" charset="-122"/>
+                <a:cs typeface="Calibri" pitchFamily="34" charset="-120"/>
+              </a:rPr>
+              <a:t>3. 優先順位を決定</a:t>
+            </a:r>
+            <a:endParaRPr lang="en-US" sz="1300" dirty="0"/>
+          </a:p>
+        </p:txBody>
+      </p:sp>
+      <p:sp>
+        <p:nvSpPr>
+          <p:cNvPr id="21" name="Text 18"/>
+          <p:cNvSpPr/>
+          <p:nvPr/>
+        </p:nvSpPr>
+        <p:spPr>
+          <a:xfrm>
+            <a:off x="4983480" y="2743200"/>
+            <a:ext cx="3200400" cy="228600"/>
+          </a:xfrm>
+          <a:prstGeom prst="rect">
+            <a:avLst/>
+          </a:prstGeom>
+          <a:noFill/>
+          <a:ln/>
+        </p:spPr>
+        <p:txBody>
+          <a:bodyPr wrap="square" lIns="0" tIns="0" rIns="0" bIns="0" rtlCol="0" anchor="ctr"/>
+          <a:lstStyle/>
+          <a:p>
+            <a:pPr indent="0" marL="0">
+              <a:buNone/>
+            </a:pPr>
+            <a:r>
+              <a:rPr lang="en-US" sz="1300" dirty="0">
+                <a:solidFill>
+                  <a:srgbClr val="374151"/>
+                </a:solidFill>
+                <a:latin typeface="Calibri" pitchFamily="34" charset="0"/>
+                <a:ea typeface="Calibri" pitchFamily="34" charset="-122"/>
+                <a:cs typeface="Calibri" pitchFamily="34" charset="-120"/>
+              </a:rPr>
+              <a:t>4. 金額配分を提示</a:t>
+            </a:r>
+            <a:endParaRPr lang="en-US" sz="1300" dirty="0"/>
+          </a:p>
+        </p:txBody>
+      </p:sp>
+      <p:sp>
+        <p:nvSpPr>
+          <p:cNvPr id="22" name="Text 19"/>
+          <p:cNvSpPr/>
+          <p:nvPr/>
+        </p:nvSpPr>
+        <p:spPr>
+          <a:xfrm>
+            <a:off x="4983480" y="3017520"/>
+            <a:ext cx="3200400" cy="228600"/>
+          </a:xfrm>
+          <a:prstGeom prst="rect">
+            <a:avLst/>
+          </a:prstGeom>
+          <a:noFill/>
+          <a:ln/>
+        </p:spPr>
+        <p:txBody>
+          <a:bodyPr wrap="square" lIns="0" tIns="0" rIns="0" bIns="0" rtlCol="0" anchor="ctr"/>
+          <a:lstStyle/>
+          <a:p>
+            <a:pPr indent="0" marL="0">
+              <a:buNone/>
+            </a:pPr>
+            <a:r>
+              <a:rPr lang="en-US" sz="1300" dirty="0">
+                <a:solidFill>
+                  <a:srgbClr val="374151"/>
+                </a:solidFill>
+                <a:latin typeface="Calibri" pitchFamily="34" charset="0"/>
+                <a:ea typeface="Calibri" pitchFamily="34" charset="-122"/>
+                <a:cs typeface="Calibri" pitchFamily="34" charset="-120"/>
+              </a:rPr>
+              <a:t>5. 根拠を説明</a:t>
+            </a:r>
+            <a:endParaRPr lang="en-US" sz="1300" dirty="0"/>
+          </a:p>
+        </p:txBody>
+      </p:sp>
+      <p:sp>
+        <p:nvSpPr>
+          <p:cNvPr id="23" name="Text 20"/>
+          <p:cNvSpPr/>
+          <p:nvPr/>
+        </p:nvSpPr>
+        <p:spPr>
+          <a:xfrm>
+            <a:off x="4983480" y="3200400"/>
+            <a:ext cx="3200400" cy="320040"/>
+          </a:xfrm>
+          <a:prstGeom prst="rect">
+            <a:avLst/>
+          </a:prstGeom>
+          <a:noFill/>
+          <a:ln/>
+        </p:spPr>
+        <p:txBody>
+          <a:bodyPr wrap="square" lIns="0" tIns="0" rIns="0" bIns="0" rtlCol="0" anchor="ctr"/>
+          <a:lstStyle/>
+          <a:p>
+            <a:pPr indent="0" marL="0">
+              <a:buNone/>
+            </a:pPr>
+            <a:r>
+              <a:rPr lang="en-US" sz="1300" b="1" dirty="0">
                 <a:solidFill>
                   <a:srgbClr val="059669"/>
                 </a:solidFill>
@@ -9159,46 +9368,7 @@
                 <a:ea typeface="Calibri" pitchFamily="34" charset="-122"/>
                 <a:cs typeface="Calibri" pitchFamily="34" charset="-120"/>
               </a:rPr>
-              <a:t>CoTプロンプト</a:t>
-            </a:r>
-            <a:endParaRPr lang="en-US" sz="1600" dirty="0"/>
-          </a:p>
-        </p:txBody>
-      </p:sp>
-      <p:sp>
-        <p:nvSpPr>
-          <p:cNvPr id="19" name="Text 16"/>
-          <p:cNvSpPr/>
-          <p:nvPr/>
-        </p:nvSpPr>
-        <p:spPr>
-          <a:xfrm>
-            <a:off x="4983480" y="1783080"/>
-            <a:ext cx="3200400" cy="228600"/>
-          </a:xfrm>
-          <a:prstGeom prst="rect">
-            <a:avLst/>
-          </a:prstGeom>
-          <a:noFill/>
-          <a:ln/>
-        </p:spPr>
-        <p:txBody>
-          <a:bodyPr wrap="square" lIns="0" tIns="0" rIns="0" bIns="0" rtlCol="0" anchor="ctr"/>
-          <a:lstStyle/>
-          <a:p>
-            <a:pPr indent="0" marL="0">
-              <a:buNone/>
-            </a:pPr>
-            <a:r>
-              <a:rPr lang="en-US" sz="1300" dirty="0">
-                <a:solidFill>
-                  <a:srgbClr val="374151"/>
-                </a:solidFill>
-                <a:latin typeface="Calibri" pitchFamily="34" charset="0"/>
-                <a:ea typeface="Calibri" pitchFamily="34" charset="-122"/>
-                <a:cs typeface="Calibri" pitchFamily="34" charset="-120"/>
-              </a:rPr>
-              <a:t>1. 市場状況を分析</a:t>
+              <a:t>→ 論理的で説得力のある回答!</a:t>
             </a:r>
             <a:endParaRPr lang="en-US" sz="1300" dirty="0"/>
           </a:p>
@@ -9206,202 +9376,7 @@
       </p:sp>
       <p:sp>
         <p:nvSpPr>
-          <p:cNvPr id="20" name="Text 17"/>
-          <p:cNvSpPr/>
-          <p:nvPr/>
-        </p:nvSpPr>
-        <p:spPr>
-          <a:xfrm>
-            <a:off x="4983480" y="2057400"/>
-            <a:ext cx="3200400" cy="228600"/>
-          </a:xfrm>
-          <a:prstGeom prst="rect">
-            <a:avLst/>
-          </a:prstGeom>
-          <a:noFill/>
-          <a:ln/>
-        </p:spPr>
-        <p:txBody>
-          <a:bodyPr wrap="square" lIns="0" tIns="0" rIns="0" bIns="0" rtlCol="0" anchor="ctr"/>
-          <a:lstStyle/>
-          <a:p>
-            <a:pPr indent="0" marL="0">
-              <a:buNone/>
-            </a:pPr>
-            <a:r>
-              <a:rPr lang="en-US" sz="1300" dirty="0">
-                <a:solidFill>
-                  <a:srgbClr val="374151"/>
-                </a:solidFill>
-                <a:latin typeface="Calibri" pitchFamily="34" charset="0"/>
-                <a:ea typeface="Calibri" pitchFamily="34" charset="-122"/>
-                <a:cs typeface="Calibri" pitchFamily="34" charset="-120"/>
-              </a:rPr>
-              <a:t>2. 各チャネルのROI推定</a:t>
-            </a:r>
-            <a:endParaRPr lang="en-US" sz="1300" dirty="0"/>
-          </a:p>
-        </p:txBody>
-      </p:sp>
-      <p:sp>
-        <p:nvSpPr>
-          <p:cNvPr id="21" name="Text 18"/>
-          <p:cNvSpPr/>
-          <p:nvPr/>
-        </p:nvSpPr>
-        <p:spPr>
-          <a:xfrm>
-            <a:off x="4983480" y="2331720"/>
-            <a:ext cx="3200400" cy="228600"/>
-          </a:xfrm>
-          <a:prstGeom prst="rect">
-            <a:avLst/>
-          </a:prstGeom>
-          <a:noFill/>
-          <a:ln/>
-        </p:spPr>
-        <p:txBody>
-          <a:bodyPr wrap="square" lIns="0" tIns="0" rIns="0" bIns="0" rtlCol="0" anchor="ctr"/>
-          <a:lstStyle/>
-          <a:p>
-            <a:pPr indent="0" marL="0">
-              <a:buNone/>
-            </a:pPr>
-            <a:r>
-              <a:rPr lang="en-US" sz="1300" dirty="0">
-                <a:solidFill>
-                  <a:srgbClr val="374151"/>
-                </a:solidFill>
-                <a:latin typeface="Calibri" pitchFamily="34" charset="0"/>
-                <a:ea typeface="Calibri" pitchFamily="34" charset="-122"/>
-                <a:cs typeface="Calibri" pitchFamily="34" charset="-120"/>
-              </a:rPr>
-              <a:t>3. 優先順位を決定</a:t>
-            </a:r>
-            <a:endParaRPr lang="en-US" sz="1300" dirty="0"/>
-          </a:p>
-        </p:txBody>
-      </p:sp>
-      <p:sp>
-        <p:nvSpPr>
-          <p:cNvPr id="22" name="Text 19"/>
-          <p:cNvSpPr/>
-          <p:nvPr/>
-        </p:nvSpPr>
-        <p:spPr>
-          <a:xfrm>
-            <a:off x="4983480" y="2606040"/>
-            <a:ext cx="3200400" cy="228600"/>
-          </a:xfrm>
-          <a:prstGeom prst="rect">
-            <a:avLst/>
-          </a:prstGeom>
-          <a:noFill/>
-          <a:ln/>
-        </p:spPr>
-        <p:txBody>
-          <a:bodyPr wrap="square" lIns="0" tIns="0" rIns="0" bIns="0" rtlCol="0" anchor="ctr"/>
-          <a:lstStyle/>
-          <a:p>
-            <a:pPr indent="0" marL="0">
-              <a:buNone/>
-            </a:pPr>
-            <a:r>
-              <a:rPr lang="en-US" sz="1300" dirty="0">
-                <a:solidFill>
-                  <a:srgbClr val="374151"/>
-                </a:solidFill>
-                <a:latin typeface="Calibri" pitchFamily="34" charset="0"/>
-                <a:ea typeface="Calibri" pitchFamily="34" charset="-122"/>
-                <a:cs typeface="Calibri" pitchFamily="34" charset="-120"/>
-              </a:rPr>
-              <a:t>4. 金額配分を提示</a:t>
-            </a:r>
-            <a:endParaRPr lang="en-US" sz="1300" dirty="0"/>
-          </a:p>
-        </p:txBody>
-      </p:sp>
-      <p:sp>
-        <p:nvSpPr>
-          <p:cNvPr id="23" name="Text 20"/>
-          <p:cNvSpPr/>
-          <p:nvPr/>
-        </p:nvSpPr>
-        <p:spPr>
-          <a:xfrm>
-            <a:off x="4983480" y="2880360"/>
-            <a:ext cx="3200400" cy="228600"/>
-          </a:xfrm>
-          <a:prstGeom prst="rect">
-            <a:avLst/>
-          </a:prstGeom>
-          <a:noFill/>
-          <a:ln/>
-        </p:spPr>
-        <p:txBody>
-          <a:bodyPr wrap="square" lIns="0" tIns="0" rIns="0" bIns="0" rtlCol="0" anchor="ctr"/>
-          <a:lstStyle/>
-          <a:p>
-            <a:pPr indent="0" marL="0">
-              <a:buNone/>
-            </a:pPr>
-            <a:r>
-              <a:rPr lang="en-US" sz="1300" dirty="0">
-                <a:solidFill>
-                  <a:srgbClr val="374151"/>
-                </a:solidFill>
-                <a:latin typeface="Calibri" pitchFamily="34" charset="0"/>
-                <a:ea typeface="Calibri" pitchFamily="34" charset="-122"/>
-                <a:cs typeface="Calibri" pitchFamily="34" charset="-120"/>
-              </a:rPr>
-              <a:t>5. 根拠を説明</a:t>
-            </a:r>
-            <a:endParaRPr lang="en-US" sz="1300" dirty="0"/>
-          </a:p>
-        </p:txBody>
-      </p:sp>
-      <p:sp>
-        <p:nvSpPr>
-          <p:cNvPr id="24" name="Text 21"/>
-          <p:cNvSpPr/>
-          <p:nvPr/>
-        </p:nvSpPr>
-        <p:spPr>
-          <a:xfrm>
-            <a:off x="4983480" y="3063240"/>
-            <a:ext cx="3200400" cy="320040"/>
-          </a:xfrm>
-          <a:prstGeom prst="rect">
-            <a:avLst/>
-          </a:prstGeom>
-          <a:noFill/>
-          <a:ln/>
-        </p:spPr>
-        <p:txBody>
-          <a:bodyPr wrap="square" lIns="0" tIns="0" rIns="0" bIns="0" rtlCol="0" anchor="ctr"/>
-          <a:lstStyle/>
-          <a:p>
-            <a:pPr indent="0" marL="0">
-              <a:buNone/>
-            </a:pPr>
-            <a:r>
-              <a:rPr lang="en-US" sz="1300" b="1" dirty="0">
-                <a:solidFill>
-                  <a:srgbClr val="059669"/>
-                </a:solidFill>
-                <a:latin typeface="Calibri" pitchFamily="34" charset="0"/>
-                <a:ea typeface="Calibri" pitchFamily="34" charset="-122"/>
-                <a:cs typeface="Calibri" pitchFamily="34" charset="-120"/>
-              </a:rPr>
-              <a:t>→ 論理的で説得力のある回答!</a:t>
-            </a:r>
-            <a:endParaRPr lang="en-US" sz="1300" dirty="0"/>
-          </a:p>
-        </p:txBody>
-      </p:sp>
-      <p:sp>
-        <p:nvSpPr>
-          <p:cNvPr id="25" name="Shape 22"/>
+          <p:cNvPr id="24" name="Shape 21"/>
           <p:cNvSpPr/>
           <p:nvPr/>
         </p:nvSpPr>
@@ -9421,7 +9396,7 @@
       </p:sp>
       <p:sp>
         <p:nvSpPr>
-          <p:cNvPr id="26" name="Text 23"/>
+          <p:cNvPr id="25" name="Text 22"/>
           <p:cNvSpPr/>
           <p:nvPr/>
         </p:nvSpPr>
@@ -9589,14 +9564,16 @@
           <a:ln/>
         </p:spPr>
         <p:txBody>
-          <a:bodyPr wrap="square" lIns="0" tIns="0" rIns="0" bIns="0" rtlCol="0" anchor="ctr"/>
+          <a:bodyPr wrap="square" lIns="0" tIns="0" rIns="0" bIns="0" rtlCol="0" anchor="ctr">
+            <a:normAutofit/>
+          </a:bodyPr>
           <a:lstStyle/>
           <a:p>
             <a:pPr indent="0" marL="0">
               <a:buNone/>
             </a:pPr>
             <a:r>
-              <a:rPr lang="en-US" sz="3200" b="1" dirty="0">
+              <a:rPr lang="en-US" sz="2200" b="1" dirty="0">
                 <a:solidFill>
                   <a:srgbClr val="111827"/>
                 </a:solidFill>
@@ -9606,7 +9583,7 @@
               </a:rPr>
               <a:t>Chain-of-Thought 応用テクニック</a:t>
             </a:r>
-            <a:endParaRPr lang="en-US" sz="3200" dirty="0"/>
+            <a:endParaRPr lang="en-US" sz="2200" dirty="0"/>
           </a:p>
         </p:txBody>
       </p:sp>
@@ -10379,14 +10356,16 @@
           <a:ln/>
         </p:spPr>
         <p:txBody>
-          <a:bodyPr wrap="square" lIns="0" tIns="0" rIns="0" bIns="0" rtlCol="0" anchor="ctr"/>
+          <a:bodyPr wrap="square" lIns="0" tIns="0" rIns="0" bIns="0" rtlCol="0" anchor="ctr">
+            <a:normAutofit/>
+          </a:bodyPr>
           <a:lstStyle/>
           <a:p>
             <a:pPr indent="0" marL="0">
               <a:buNone/>
             </a:pPr>
             <a:r>
-              <a:rPr lang="en-US" sz="3200" b="1" dirty="0">
+              <a:rPr lang="en-US" sz="2200" b="1" dirty="0">
                 <a:solidFill>
                   <a:srgbClr val="111827"/>
                 </a:solidFill>
@@ -10396,7 +10375,7 @@
               </a:rPr>
               <a:t>テクニック3 — ステップバイステップ指示</a:t>
             </a:r>
-            <a:endParaRPr lang="en-US" sz="3200" dirty="0"/>
+            <a:endParaRPr lang="en-US" sz="2200" dirty="0"/>
           </a:p>
         </p:txBody>
       </p:sp>
@@ -10509,8 +10488,8 @@
         </p:nvSpPr>
         <p:spPr>
           <a:xfrm>
-            <a:off x="685800" y="1051560"/>
-            <a:ext cx="7772400" cy="457200"/>
+            <a:off x="685800" y="1371600"/>
+            <a:ext cx="7772400" cy="411480"/>
           </a:xfrm>
           <a:prstGeom prst="rect">
             <a:avLst/>
@@ -10529,8 +10508,8 @@
         </p:nvSpPr>
         <p:spPr>
           <a:xfrm>
-            <a:off x="868680" y="1051560"/>
-            <a:ext cx="7406640" cy="457200"/>
+            <a:off x="868680" y="1371600"/>
+            <a:ext cx="7406640" cy="411480"/>
           </a:xfrm>
           <a:prstGeom prst="rect">
             <a:avLst/>
@@ -10546,7 +10525,7 @@
               <a:buNone/>
             </a:pPr>
             <a:r>
-              <a:rPr lang="en-US" sz="1600" b="1" dirty="0">
+              <a:rPr lang="en-US" sz="1300" b="1" dirty="0">
                 <a:solidFill>
                   <a:srgbClr val="2563EB"/>
                 </a:solidFill>
@@ -10556,7 +10535,7 @@
               </a:rPr>
               <a:t>CoT = 考え方を指定  /  ステップバイステップ = 作業手順を分解</a:t>
             </a:r>
-            <a:endParaRPr lang="en-US" sz="1600" dirty="0"/>
+            <a:endParaRPr lang="en-US" sz="1300" dirty="0"/>
           </a:p>
         </p:txBody>
       </p:sp>
@@ -10568,7 +10547,7 @@
         </p:nvSpPr>
         <p:spPr>
           <a:xfrm>
-            <a:off x="685800" y="1737360"/>
+            <a:off x="685800" y="2011680"/>
             <a:ext cx="777240" cy="411480"/>
           </a:xfrm>
           <a:prstGeom prst="rect">
@@ -10590,7 +10569,7 @@
         </p:nvSpPr>
         <p:spPr>
           <a:xfrm>
-            <a:off x="685800" y="1737360"/>
+            <a:off x="685800" y="2011680"/>
             <a:ext cx="777240" cy="411480"/>
           </a:xfrm>
           <a:prstGeom prst="rect">
@@ -10629,7 +10608,7 @@
         </p:nvSpPr>
         <p:spPr>
           <a:xfrm>
-            <a:off x="1645920" y="1737360"/>
+            <a:off x="1645920" y="2011680"/>
             <a:ext cx="6583680" cy="411480"/>
           </a:xfrm>
           <a:prstGeom prst="rect">
@@ -10668,7 +10647,7 @@
         </p:nvSpPr>
         <p:spPr>
           <a:xfrm>
-            <a:off x="1051560" y="2148840"/>
+            <a:off x="1051560" y="2423160"/>
             <a:ext cx="0" cy="137160"/>
           </a:xfrm>
           <a:prstGeom prst="line">
@@ -10691,7 +10670,7 @@
         </p:nvSpPr>
         <p:spPr>
           <a:xfrm>
-            <a:off x="685800" y="2286000"/>
+            <a:off x="685800" y="2514600"/>
             <a:ext cx="777240" cy="411480"/>
           </a:xfrm>
           <a:prstGeom prst="rect">
@@ -10713,7 +10692,7 @@
         </p:nvSpPr>
         <p:spPr>
           <a:xfrm>
-            <a:off x="685800" y="2286000"/>
+            <a:off x="685800" y="2514600"/>
             <a:ext cx="777240" cy="411480"/>
           </a:xfrm>
           <a:prstGeom prst="rect">
@@ -10752,7 +10731,7 @@
         </p:nvSpPr>
         <p:spPr>
           <a:xfrm>
-            <a:off x="1645920" y="2286000"/>
+            <a:off x="1645920" y="2514600"/>
             <a:ext cx="6583680" cy="411480"/>
           </a:xfrm>
           <a:prstGeom prst="rect">
@@ -10791,7 +10770,7 @@
         </p:nvSpPr>
         <p:spPr>
           <a:xfrm>
-            <a:off x="1051560" y="2697480"/>
+            <a:off x="1051560" y="2926080"/>
             <a:ext cx="0" cy="137160"/>
           </a:xfrm>
           <a:prstGeom prst="line">
@@ -10814,7 +10793,7 @@
         </p:nvSpPr>
         <p:spPr>
           <a:xfrm>
-            <a:off x="685800" y="2834640"/>
+            <a:off x="685800" y="3017520"/>
             <a:ext cx="777240" cy="411480"/>
           </a:xfrm>
           <a:prstGeom prst="rect">
@@ -10836,7 +10815,7 @@
         </p:nvSpPr>
         <p:spPr>
           <a:xfrm>
-            <a:off x="685800" y="2834640"/>
+            <a:off x="685800" y="3017520"/>
             <a:ext cx="777240" cy="411480"/>
           </a:xfrm>
           <a:prstGeom prst="rect">
@@ -10875,7 +10854,7 @@
         </p:nvSpPr>
         <p:spPr>
           <a:xfrm>
-            <a:off x="1645920" y="2834640"/>
+            <a:off x="1645920" y="3017520"/>
             <a:ext cx="6583680" cy="411480"/>
           </a:xfrm>
           <a:prstGeom prst="rect">
@@ -10914,7 +10893,7 @@
         </p:nvSpPr>
         <p:spPr>
           <a:xfrm>
-            <a:off x="1051560" y="3246120"/>
+            <a:off x="1051560" y="3429000"/>
             <a:ext cx="0" cy="137160"/>
           </a:xfrm>
           <a:prstGeom prst="line">
@@ -10937,7 +10916,7 @@
         </p:nvSpPr>
         <p:spPr>
           <a:xfrm>
-            <a:off x="685800" y="3383280"/>
+            <a:off x="685800" y="3520440"/>
             <a:ext cx="777240" cy="411480"/>
           </a:xfrm>
           <a:prstGeom prst="rect">
@@ -10959,7 +10938,7 @@
         </p:nvSpPr>
         <p:spPr>
           <a:xfrm>
-            <a:off x="685800" y="3383280"/>
+            <a:off x="685800" y="3520440"/>
             <a:ext cx="777240" cy="411480"/>
           </a:xfrm>
           <a:prstGeom prst="rect">
@@ -10998,7 +10977,7 @@
         </p:nvSpPr>
         <p:spPr>
           <a:xfrm>
-            <a:off x="1645920" y="3383280"/>
+            <a:off x="1645920" y="3520440"/>
             <a:ext cx="6583680" cy="411480"/>
           </a:xfrm>
           <a:prstGeom prst="rect">
@@ -11219,14 +11198,16 @@
           <a:ln/>
         </p:spPr>
         <p:txBody>
-          <a:bodyPr wrap="square" lIns="0" tIns="0" rIns="0" bIns="0" rtlCol="0" anchor="ctr"/>
+          <a:bodyPr wrap="square" lIns="0" tIns="0" rIns="0" bIns="0" rtlCol="0" anchor="ctr">
+            <a:normAutofit/>
+          </a:bodyPr>
           <a:lstStyle/>
           <a:p>
             <a:pPr indent="0" marL="0">
               <a:buNone/>
             </a:pPr>
             <a:r>
-              <a:rPr lang="en-US" sz="3200" b="1" dirty="0">
+              <a:rPr lang="en-US" sz="2200" b="1" dirty="0">
                 <a:solidFill>
                   <a:srgbClr val="111827"/>
                 </a:solidFill>
@@ -11236,7 +11217,7 @@
               </a:rPr>
               <a:t>テクニック4 — 出力形式指定</a:t>
             </a:r>
-            <a:endParaRPr lang="en-US" sz="3200" dirty="0"/>
+            <a:endParaRPr lang="en-US" sz="2200" dirty="0"/>
           </a:p>
         </p:txBody>
       </p:sp>
@@ -11349,7 +11330,7 @@
         </p:nvSpPr>
         <p:spPr>
           <a:xfrm>
-            <a:off x="685800" y="1051560"/>
+            <a:off x="685800" y="1371600"/>
             <a:ext cx="1097280" cy="320040"/>
           </a:xfrm>
           <a:prstGeom prst="rect">
@@ -11371,7 +11352,7 @@
         </p:nvSpPr>
         <p:spPr>
           <a:xfrm>
-            <a:off x="685800" y="1051560"/>
+            <a:off x="685800" y="1371600"/>
             <a:ext cx="1097280" cy="320040"/>
           </a:xfrm>
           <a:prstGeom prst="rect">
@@ -11410,7 +11391,7 @@
         </p:nvSpPr>
         <p:spPr>
           <a:xfrm>
-            <a:off x="1920240" y="1051560"/>
+            <a:off x="1920240" y="1371600"/>
             <a:ext cx="1097280" cy="320040"/>
           </a:xfrm>
           <a:prstGeom prst="rect">
@@ -11432,7 +11413,7 @@
         </p:nvSpPr>
         <p:spPr>
           <a:xfrm>
-            <a:off x="1920240" y="1051560"/>
+            <a:off x="1920240" y="1371600"/>
             <a:ext cx="1097280" cy="320040"/>
           </a:xfrm>
           <a:prstGeom prst="rect">
@@ -11471,7 +11452,7 @@
         </p:nvSpPr>
         <p:spPr>
           <a:xfrm>
-            <a:off x="3154680" y="1051560"/>
+            <a:off x="3154680" y="1371600"/>
             <a:ext cx="1097280" cy="320040"/>
           </a:xfrm>
           <a:prstGeom prst="rect">
@@ -11493,7 +11474,7 @@
         </p:nvSpPr>
         <p:spPr>
           <a:xfrm>
-            <a:off x="3154680" y="1051560"/>
+            <a:off x="3154680" y="1371600"/>
             <a:ext cx="1097280" cy="320040"/>
           </a:xfrm>
           <a:prstGeom prst="rect">
@@ -11532,7 +11513,7 @@
         </p:nvSpPr>
         <p:spPr>
           <a:xfrm>
-            <a:off x="4389120" y="1051560"/>
+            <a:off x="4389120" y="1371600"/>
             <a:ext cx="1097280" cy="320040"/>
           </a:xfrm>
           <a:prstGeom prst="rect">
@@ -11554,7 +11535,7 @@
         </p:nvSpPr>
         <p:spPr>
           <a:xfrm>
-            <a:off x="4389120" y="1051560"/>
+            <a:off x="4389120" y="1371600"/>
             <a:ext cx="1097280" cy="320040"/>
           </a:xfrm>
           <a:prstGeom prst="rect">
@@ -11593,7 +11574,7 @@
         </p:nvSpPr>
         <p:spPr>
           <a:xfrm>
-            <a:off x="5623560" y="1051560"/>
+            <a:off x="5623560" y="1371600"/>
             <a:ext cx="1097280" cy="320040"/>
           </a:xfrm>
           <a:prstGeom prst="rect">
@@ -11615,7 +11596,7 @@
         </p:nvSpPr>
         <p:spPr>
           <a:xfrm>
-            <a:off x="5623560" y="1051560"/>
+            <a:off x="5623560" y="1371600"/>
             <a:ext cx="1097280" cy="320040"/>
           </a:xfrm>
           <a:prstGeom prst="rect">
@@ -11654,7 +11635,7 @@
         </p:nvSpPr>
         <p:spPr>
           <a:xfrm>
-            <a:off x="6858000" y="1051560"/>
+            <a:off x="6858000" y="1371600"/>
             <a:ext cx="1097280" cy="320040"/>
           </a:xfrm>
           <a:prstGeom prst="rect">
@@ -11676,7 +11657,7 @@
         </p:nvSpPr>
         <p:spPr>
           <a:xfrm>
-            <a:off x="6858000" y="1051560"/>
+            <a:off x="6858000" y="1371600"/>
             <a:ext cx="1097280" cy="320040"/>
           </a:xfrm>
           <a:prstGeom prst="rect">
@@ -11715,8 +11696,8 @@
         </p:nvSpPr>
         <p:spPr>
           <a:xfrm>
-            <a:off x="685800" y="1645920"/>
-            <a:ext cx="3566160" cy="2286000"/>
+            <a:off x="685800" y="1874520"/>
+            <a:ext cx="3566160" cy="2103120"/>
           </a:xfrm>
           <a:prstGeom prst="rect">
             <a:avLst/>
@@ -11740,7 +11721,7 @@
         </p:nvSpPr>
         <p:spPr>
           <a:xfrm>
-            <a:off x="685800" y="1645920"/>
+            <a:off x="685800" y="1874520"/>
             <a:ext cx="3566160" cy="365760"/>
           </a:xfrm>
           <a:prstGeom prst="rect">
@@ -11760,7 +11741,7 @@
         </p:nvSpPr>
         <p:spPr>
           <a:xfrm>
-            <a:off x="822960" y="1645920"/>
+            <a:off x="822960" y="1874520"/>
             <a:ext cx="3291840" cy="365760"/>
           </a:xfrm>
           <a:prstGeom prst="rect">
@@ -11799,7 +11780,7 @@
         </p:nvSpPr>
         <p:spPr>
           <a:xfrm>
-            <a:off x="868680" y="2103120"/>
+            <a:off x="868680" y="2331720"/>
             <a:ext cx="3200400" cy="1645920"/>
           </a:xfrm>
           <a:prstGeom prst="rect">
@@ -11895,8 +11876,8 @@
         </p:nvSpPr>
         <p:spPr>
           <a:xfrm>
-            <a:off x="4892040" y="1645920"/>
-            <a:ext cx="3566160" cy="2286000"/>
+            <a:off x="4892040" y="1874520"/>
+            <a:ext cx="3566160" cy="2103120"/>
           </a:xfrm>
           <a:prstGeom prst="rect">
             <a:avLst/>
@@ -11920,7 +11901,7 @@
         </p:nvSpPr>
         <p:spPr>
           <a:xfrm>
-            <a:off x="4892040" y="1645920"/>
+            <a:off x="4892040" y="1874520"/>
             <a:ext cx="3566160" cy="365760"/>
           </a:xfrm>
           <a:prstGeom prst="rect">
@@ -11940,7 +11921,7 @@
         </p:nvSpPr>
         <p:spPr>
           <a:xfrm>
-            <a:off x="5029200" y="1645920"/>
+            <a:off x="5029200" y="1874520"/>
             <a:ext cx="3291840" cy="365760"/>
           </a:xfrm>
           <a:prstGeom prst="rect">
@@ -11979,7 +11960,7 @@
         </p:nvSpPr>
         <p:spPr>
           <a:xfrm>
-            <a:off x="5074920" y="2103120"/>
+            <a:off x="5074920" y="2331720"/>
             <a:ext cx="3200400" cy="1645920"/>
           </a:xfrm>
           <a:prstGeom prst="rect">
